--- a/slides/slide_04.pptx
+++ b/slides/slide_04.pptx
@@ -26,61 +26,38 @@
       <p:bold r:id="rId9"/>
     </p:embeddedFont>
     <p:embeddedFont>
-      <p:font typeface="Bebas Neue" panose="020B0606020202050201" pitchFamily="2" charset="0"/>
+      <p:font typeface="Hanken Grotesk" panose="020B0604020202020204" charset="0"/>
       <p:regular r:id="rId10"/>
-    </p:embeddedFont>
-    <p:embeddedFont>
-      <p:font typeface="DM Mono" panose="020B0509040201040103" pitchFamily="1" charset="0"/>
-      <p:regular r:id="rId11"/>
+      <p:bold r:id="rId11"/>
       <p:italic r:id="rId12"/>
-    </p:embeddedFont>
-    <p:embeddedFont>
-      <p:font typeface="Hanken Grotesk" panose="020B0604020202020204" charset="0"/>
-      <p:regular r:id="rId13"/>
-      <p:bold r:id="rId14"/>
-      <p:italic r:id="rId15"/>
-      <p:boldItalic r:id="rId16"/>
-    </p:embeddedFont>
-    <p:embeddedFont>
-      <p:font typeface="Open Sans" panose="020B0606030504020204" pitchFamily="2" charset="0"/>
-      <p:regular r:id="rId17"/>
-      <p:bold r:id="rId18"/>
-      <p:italic r:id="rId19"/>
-      <p:boldItalic r:id="rId20"/>
+      <p:boldItalic r:id="rId13"/>
     </p:embeddedFont>
     <p:embeddedFont>
       <p:font typeface="Raleway" pitchFamily="2" charset="0"/>
-      <p:regular r:id="rId21"/>
-      <p:bold r:id="rId22"/>
-      <p:italic r:id="rId23"/>
-      <p:boldItalic r:id="rId24"/>
+      <p:regular r:id="rId14"/>
+      <p:bold r:id="rId15"/>
+      <p:italic r:id="rId16"/>
+      <p:boldItalic r:id="rId17"/>
     </p:embeddedFont>
     <p:embeddedFont>
       <p:font typeface="Raleway Black" pitchFamily="2" charset="0"/>
-      <p:bold r:id="rId25"/>
-      <p:boldItalic r:id="rId26"/>
+      <p:bold r:id="rId18"/>
+      <p:boldItalic r:id="rId19"/>
     </p:embeddedFont>
     <p:embeddedFont>
       <p:font typeface="Raleway ExtraBold" pitchFamily="2" charset="0"/>
-      <p:bold r:id="rId27"/>
-      <p:boldItalic r:id="rId28"/>
+      <p:bold r:id="rId20"/>
+      <p:boldItalic r:id="rId21"/>
     </p:embeddedFont>
     <p:embeddedFont>
       <p:font typeface="Roboto Medium" panose="02000000000000000000" pitchFamily="2" charset="0"/>
-      <p:regular r:id="rId29"/>
-      <p:italic r:id="rId30"/>
+      <p:regular r:id="rId22"/>
+      <p:italic r:id="rId23"/>
     </p:embeddedFont>
     <p:embeddedFont>
       <p:font typeface="Roboto" panose="02000000000000000000" pitchFamily="2"/>
-      <p:bold r:id="rId31"/>
-      <p:boldItalic r:id="rId32"/>
-    </p:embeddedFont>
-    <p:embeddedFont>
-      <p:font typeface="Segoe UI" panose="020B0502040204020203" pitchFamily="2" charset="0"/>
-      <p:regular r:id="rId33"/>
-      <p:bold r:id="rId34"/>
-      <p:italic r:id="rId35"/>
-      <p:boldItalic r:id="rId36"/>
+      <p:bold r:id="rId24"/>
+      <p:boldItalic r:id="rId25"/>
     </p:embeddedFont>
   </p:embeddedFontLst>
   <p:custDataLst>
@@ -884,7 +861,7 @@
           <a:bodyPr/>
           <a:lstStyle/>
           <a:p>
-            <a:fld id="{02757C23-0F17-4A56-8093-8F78285354DA}" type="datetimeFigureOut">
+            <a:fld id="{C72A1BFD-CA26-4ED1-A979-539743F56D39}" type="datetimeFigureOut">
               <a:rPr lang="en-US" smtClean="0"/>
               <a:t>11/7/2009</a:t>
             </a:fld>
@@ -1048,7 +1025,7 @@
           <a:bodyPr/>
           <a:lstStyle/>
           <a:p>
-            <a:fld id="{8E0D4169-8600-4A5F-8A22-5BEE69398AC0}" type="datetimeFigureOut">
+            <a:fld id="{52708AE4-7187-472F-9D84-C3A6050BC876}" type="datetimeFigureOut">
               <a:rPr lang="en-US" smtClean="0"/>
               <a:t>11/7/2009</a:t>
             </a:fld>
@@ -1212,7 +1189,7 @@
           <a:bodyPr/>
           <a:lstStyle/>
           <a:p>
-            <a:fld id="{B4FDE1BB-77DC-43C2-997D-6D472AB7A85F}" type="datetimeFigureOut">
+            <a:fld id="{A67ACC4F-ADBD-4576-8EA0-36B6DBF1DAD8}" type="datetimeFigureOut">
               <a:rPr lang="en-US" smtClean="0"/>
               <a:t>11/7/2009</a:t>
             </a:fld>
@@ -13117,7 +13094,7 @@
           <a:bodyPr/>
           <a:lstStyle/>
           <a:p>
-            <a:fld id="{316EDB72-6FC3-4615-B27A-58A303EE4C28}" type="datetimeFigureOut">
+            <a:fld id="{69C7CC63-82E1-4FBF-8912-B1464092AD19}" type="datetimeFigureOut">
               <a:rPr lang="en-US" smtClean="0"/>
               <a:t>11/7/2009</a:t>
             </a:fld>
@@ -33218,7 +33195,7 @@
           <a:bodyPr/>
           <a:lstStyle/>
           <a:p>
-            <a:fld id="{70FDBB78-DE9A-4E7A-87CD-D239CB5F0E41}" type="datetimeFigureOut">
+            <a:fld id="{215DC59E-1DC9-42E2-B75C-DB3C9F679DBE}" type="datetimeFigureOut">
               <a:rPr lang="en-US" smtClean="0"/>
               <a:t>11/7/2009</a:t>
             </a:fld>
@@ -38865,7 +38842,7 @@
           <a:bodyPr/>
           <a:lstStyle/>
           <a:p>
-            <a:fld id="{BBC14972-967A-4095-92F3-1DC534C5EC56}" type="datetimeFigureOut">
+            <a:fld id="{819E1B35-B174-4E95-8D5B-3934B6C53C7A}" type="datetimeFigureOut">
               <a:rPr lang="en-US" smtClean="0"/>
               <a:t>11/7/2009</a:t>
             </a:fld>
@@ -39254,7 +39231,7 @@
           <a:bodyPr/>
           <a:lstStyle/>
           <a:p>
-            <a:fld id="{39F464C0-F8A0-4854-9A5A-A093A7F63354}" type="datetimeFigureOut">
+            <a:fld id="{0EC63907-4086-4274-AD73-B39B77F23147}" type="datetimeFigureOut">
               <a:rPr lang="en-US" smtClean="0"/>
               <a:t>11/7/2009</a:t>
             </a:fld>
@@ -39367,7 +39344,7 @@
           <a:bodyPr/>
           <a:lstStyle/>
           <a:p>
-            <a:fld id="{F7CECF2E-E0EF-4CC8-9EBB-C53DEDEF8D5F}" type="datetimeFigureOut">
+            <a:fld id="{521CBE97-BFC1-4761-8130-C9683F8259D0}" type="datetimeFigureOut">
               <a:rPr lang="en-US" smtClean="0"/>
               <a:t>11/7/2009</a:t>
             </a:fld>
@@ -39457,7 +39434,7 @@
           <a:bodyPr/>
           <a:lstStyle/>
           <a:p>
-            <a:fld id="{994530A0-E22E-4613-A3FC-67B6C39C3162}" type="datetimeFigureOut">
+            <a:fld id="{EAB44B67-A3AA-4AE2-BD20-9741F1F1BEFC}" type="datetimeFigureOut">
               <a:rPr lang="en-US" smtClean="0"/>
               <a:t>11/7/2009</a:t>
             </a:fld>
@@ -39712,7 +39689,7 @@
           <a:bodyPr/>
           <a:lstStyle/>
           <a:p>
-            <a:fld id="{01507F02-F3A1-412A-8D5E-2F42009D4131}" type="datetimeFigureOut">
+            <a:fld id="{E79D4AFE-41DF-4D37-8D48-0F56F5E2A3DE}" type="datetimeFigureOut">
               <a:rPr lang="en-US" smtClean="0"/>
               <a:t>11/7/2009</a:t>
             </a:fld>
@@ -39944,7 +39921,7 @@
           <a:bodyPr/>
           <a:lstStyle/>
           <a:p>
-            <a:fld id="{D46449A1-A73F-4F18-B46C-EA0A92C7D845}" type="datetimeFigureOut">
+            <a:fld id="{EDB51F2D-1D76-49AF-827C-C5802FADFDF2}" type="datetimeFigureOut">
               <a:rPr lang="en-US" smtClean="0"/>
               <a:t>11/7/2009</a:t>
             </a:fld>
@@ -41804,14 +41781,16 @@
           <a:lstStyle/>
           <a:p>
             <a:r>
-              <a:rPr lang="en">
-                <a:solidFill>
-                  <a:srgbClr val="FFFFFF"/>
-                </a:solidFill>
+              <a:rPr lang="en" b="1">
+                <a:latin typeface="Arial"/>
+                <a:cs typeface="Arial"/>
               </a:rPr>
               <a:t>[ОСНОВНЫЕ ТЕЗИСЫ И КОНЦЕПЦИИ]</a:t>
             </a:r>
-            <a:endParaRPr lang="ru-RU"/>
+            <a:endParaRPr lang="ru-RU" b="1">
+              <a:latin typeface="Arial"/>
+              <a:cs typeface="Arial"/>
+            </a:endParaRPr>
           </a:p>
           <a:p>
             <a:br>
@@ -41848,14 +41827,19 @@
           <a:p>
             <a:pPr marL="0" indent="0"/>
             <a:r>
-              <a:rPr lang="en">
+              <a:rPr lang="en" b="1">
                 <a:solidFill>
                   <a:srgbClr val="FFFFFF"/>
                 </a:solidFill>
+                <a:latin typeface="Arial"/>
+                <a:cs typeface="Arial"/>
               </a:rPr>
               <a:t>[НАПРАВЛЕНИЕ 01]</a:t>
             </a:r>
-            <a:endParaRPr lang="en"/>
+            <a:endParaRPr lang="en" b="1">
+              <a:latin typeface="Arial"/>
+              <a:cs typeface="Arial"/>
+            </a:endParaRPr>
           </a:p>
         </p:txBody>
       </p:sp>
@@ -41894,10 +41878,12 @@
               <a:buNone/>
             </a:pPr>
             <a:r>
-              <a:rPr lang="en"/>
+              <a:rPr lang="en" b="1">
+                <a:latin typeface="Arial"/>
+                <a:cs typeface="Arial"/>
+              </a:rPr>
               <a:t>ИНВЕСТОРЫ</a:t>
             </a:r>
-            <a:endParaRPr lang="en"/>
           </a:p>
         </p:txBody>
       </p:sp>
@@ -41932,15 +41918,13 @@
                 <a:solidFill>
                   <a:srgbClr val="FFFFFF"/>
                 </a:solidFill>
+                <a:latin typeface="Arial"/>
+                <a:cs typeface="Arial"/>
               </a:rPr>
               <a:t>[Опишите суть данной идеи, концепции или направления развития вашего проекта в 3–4 строках. Это поле показывает визуальный объем текста]</a:t>
             </a:r>
             <a:br>
-              <a:rPr lang="en">
-                <a:solidFill>
-                  <a:srgbClr val="FFFFFF"/>
-                </a:solidFill>
-              </a:rPr>
+              <a:rPr lang="en"/>
             </a:br>
             <a:endParaRPr lang="en"/>
           </a:p>
@@ -41973,10 +41957,16 @@
           <a:p>
             <a:pPr marL="0" indent="0"/>
             <a:r>
-              <a:rPr lang="en"/>
+              <a:rPr lang="en">
+                <a:latin typeface="Arial"/>
+                <a:cs typeface="Arial"/>
+              </a:rPr>
               <a:t>Когда дело доходит до выбора инвесторов для презентации, важно изучить потенциальных инвесторов и понять их предпочтения, цели и интересы</a:t>
             </a:r>
-            <a:endParaRPr lang="ru-RU" err="1"/>
+            <a:endParaRPr lang="ru-RU" err="1">
+              <a:latin typeface="Arial"/>
+              <a:cs typeface="Arial"/>
+            </a:endParaRPr>
           </a:p>
         </p:txBody>
       </p:sp>
@@ -42007,10 +41997,16 @@
           <a:p>
             <a:pPr marL="0" indent="0"/>
             <a:r>
-              <a:rPr lang="en"/>
+              <a:rPr lang="en">
+                <a:latin typeface="Arial"/>
+                <a:cs typeface="Arial"/>
+              </a:rPr>
               <a:t>Ценность продукта определяется тем, сколько покупатели готовы за него заплатить. Это совокупность факторов, включая качество продукта, его характеристики и то, насколько хорошо он отвечает потребностям клиентов</a:t>
             </a:r>
-            <a:endParaRPr lang="ru-RU" err="1"/>
+            <a:endParaRPr lang="ru-RU" err="1">
+              <a:latin typeface="Arial"/>
+              <a:cs typeface="Arial"/>
+            </a:endParaRPr>
           </a:p>
         </p:txBody>
       </p:sp>
@@ -42049,10 +42045,12 @@
               <a:buNone/>
             </a:pPr>
             <a:r>
-              <a:rPr lang="en"/>
+              <a:rPr lang="en" b="1">
+                <a:latin typeface="Arial"/>
+                <a:cs typeface="Arial"/>
+              </a:rPr>
               <a:t>ЦЕННОСТЬ</a:t>
             </a:r>
-            <a:endParaRPr lang="en"/>
           </a:p>
         </p:txBody>
       </p:sp>

--- a/slides/slide_04.pptx
+++ b/slides/slide_04.pptx
@@ -861,7 +861,7 @@
           <a:bodyPr/>
           <a:lstStyle/>
           <a:p>
-            <a:fld id="{C72A1BFD-CA26-4ED1-A979-539743F56D39}" type="datetimeFigureOut">
+            <a:fld id="{6BABD49E-D88F-46F6-91E9-06E2633C8AE6}" type="datetimeFigureOut">
               <a:rPr lang="en-US" smtClean="0"/>
               <a:t>11/7/2009</a:t>
             </a:fld>
@@ -1025,7 +1025,7 @@
           <a:bodyPr/>
           <a:lstStyle/>
           <a:p>
-            <a:fld id="{52708AE4-7187-472F-9D84-C3A6050BC876}" type="datetimeFigureOut">
+            <a:fld id="{AAD4D64C-F359-4BBB-90D9-2242221A7B63}" type="datetimeFigureOut">
               <a:rPr lang="en-US" smtClean="0"/>
               <a:t>11/7/2009</a:t>
             </a:fld>
@@ -1189,7 +1189,7 @@
           <a:bodyPr/>
           <a:lstStyle/>
           <a:p>
-            <a:fld id="{A67ACC4F-ADBD-4576-8EA0-36B6DBF1DAD8}" type="datetimeFigureOut">
+            <a:fld id="{593ED3FF-7D93-4472-A4C9-7F44F23F600A}" type="datetimeFigureOut">
               <a:rPr lang="en-US" smtClean="0"/>
               <a:t>11/7/2009</a:t>
             </a:fld>
@@ -13094,7 +13094,7 @@
           <a:bodyPr/>
           <a:lstStyle/>
           <a:p>
-            <a:fld id="{69C7CC63-82E1-4FBF-8912-B1464092AD19}" type="datetimeFigureOut">
+            <a:fld id="{F95A2221-2201-48A4-990A-773FDA217731}" type="datetimeFigureOut">
               <a:rPr lang="en-US" smtClean="0"/>
               <a:t>11/7/2009</a:t>
             </a:fld>
@@ -33195,7 +33195,7 @@
           <a:bodyPr/>
           <a:lstStyle/>
           <a:p>
-            <a:fld id="{215DC59E-1DC9-42E2-B75C-DB3C9F679DBE}" type="datetimeFigureOut">
+            <a:fld id="{2D79C12E-BE24-484D-AD72-345B90F50916}" type="datetimeFigureOut">
               <a:rPr lang="en-US" smtClean="0"/>
               <a:t>11/7/2009</a:t>
             </a:fld>
@@ -38842,7 +38842,7 @@
           <a:bodyPr/>
           <a:lstStyle/>
           <a:p>
-            <a:fld id="{819E1B35-B174-4E95-8D5B-3934B6C53C7A}" type="datetimeFigureOut">
+            <a:fld id="{0618BD48-F8C0-4F16-8C16-9F8DD0A5E979}" type="datetimeFigureOut">
               <a:rPr lang="en-US" smtClean="0"/>
               <a:t>11/7/2009</a:t>
             </a:fld>
@@ -39231,7 +39231,7 @@
           <a:bodyPr/>
           <a:lstStyle/>
           <a:p>
-            <a:fld id="{0EC63907-4086-4274-AD73-B39B77F23147}" type="datetimeFigureOut">
+            <a:fld id="{C9D6132F-7CD8-47E1-B3E7-67B596760438}" type="datetimeFigureOut">
               <a:rPr lang="en-US" smtClean="0"/>
               <a:t>11/7/2009</a:t>
             </a:fld>
@@ -39344,7 +39344,7 @@
           <a:bodyPr/>
           <a:lstStyle/>
           <a:p>
-            <a:fld id="{521CBE97-BFC1-4761-8130-C9683F8259D0}" type="datetimeFigureOut">
+            <a:fld id="{71FCCFC1-9429-4B7D-9D45-FCE539819D33}" type="datetimeFigureOut">
               <a:rPr lang="en-US" smtClean="0"/>
               <a:t>11/7/2009</a:t>
             </a:fld>
@@ -39434,7 +39434,7 @@
           <a:bodyPr/>
           <a:lstStyle/>
           <a:p>
-            <a:fld id="{EAB44B67-A3AA-4AE2-BD20-9741F1F1BEFC}" type="datetimeFigureOut">
+            <a:fld id="{31A0E1E2-9456-446D-BE35-9563B3F2D031}" type="datetimeFigureOut">
               <a:rPr lang="en-US" smtClean="0"/>
               <a:t>11/7/2009</a:t>
             </a:fld>
@@ -39689,7 +39689,7 @@
           <a:bodyPr/>
           <a:lstStyle/>
           <a:p>
-            <a:fld id="{E79D4AFE-41DF-4D37-8D48-0F56F5E2A3DE}" type="datetimeFigureOut">
+            <a:fld id="{9E3CDEF3-0082-4507-B2CD-C38667F01352}" type="datetimeFigureOut">
               <a:rPr lang="en-US" smtClean="0"/>
               <a:t>11/7/2009</a:t>
             </a:fld>
@@ -39921,7 +39921,7 @@
           <a:bodyPr/>
           <a:lstStyle/>
           <a:p>
-            <a:fld id="{EDB51F2D-1D76-49AF-827C-C5802FADFDF2}" type="datetimeFigureOut">
+            <a:fld id="{C35CC419-11EB-4EF0-BDE0-E3DCE36D4EEF}" type="datetimeFigureOut">
               <a:rPr lang="en-US" smtClean="0"/>
               <a:t>11/7/2009</a:t>
             </a:fld>
